--- a/apex-strategy-deck.pptx
+++ b/apex-strategy-deck.pptx
@@ -15410,7 +15410,7 @@
                 <a:ea typeface="Cambria" pitchFamily="34" charset="-122"/>
                 <a:cs typeface="Cambria" pitchFamily="34" charset="-120"/>
               </a:rPr>
-              <a:t>It reproduces your estimate exactly</a:t>
+              <a:t>The calibration replay is internally traceable</a:t>
             </a:r>
             <a:endParaRPr lang="en-US" sz="3400" dirty="0"/>
           </a:p>
@@ -16147,6 +16147,280 @@
                           <a:cs typeface="Calibri" pitchFamily="34" charset="-120"/>
                         </a:rPr>
                         <a:t>$16,800</a:t>
+                      </a:r>
+                      <a:endParaRPr lang="en-US" sz="1250" dirty="0">
+                        <a:latin typeface="Calibri" charset="0"/>
+                        <a:ea typeface="Calibri" charset="0"/>
+                        <a:cs typeface="Calibri" charset="0"/>
+                      </a:endParaRPr>
+                    </a:p>
+                  </a:txBody>
+                  <a:tcPr marL="73152" marR="73152" marT="73152" marB="73152" anchor="ctr">
+                    <a:lnL w="9525" cap="flat" cmpd="sng" algn="ctr">
+                      <a:solidFill>
+                        <a:srgbClr val="D4CFC5"/>
+                      </a:solidFill>
+                      <a:prstDash val="solid"/>
+                      <a:round/>
+                      <a:headEnd type="none" w="med" len="med"/>
+                      <a:tailEnd type="none" w="med" len="med"/>
+                    </a:lnL>
+                    <a:lnR w="9525" cap="flat" cmpd="sng" algn="ctr">
+                      <a:solidFill>
+                        <a:srgbClr val="D4CFC5"/>
+                      </a:solidFill>
+                      <a:prstDash val="solid"/>
+                      <a:round/>
+                      <a:headEnd type="none" w="med" len="med"/>
+                      <a:tailEnd type="none" w="med" len="med"/>
+                    </a:lnR>
+                    <a:lnT w="9525" cap="flat" cmpd="sng" algn="ctr">
+                      <a:solidFill>
+                        <a:srgbClr val="D4CFC5"/>
+                      </a:solidFill>
+                      <a:prstDash val="solid"/>
+                      <a:round/>
+                      <a:headEnd type="none" w="med" len="med"/>
+                      <a:tailEnd type="none" w="med" len="med"/>
+                    </a:lnT>
+                    <a:lnB w="9525" cap="flat" cmpd="sng" algn="ctr">
+                      <a:solidFill>
+                        <a:srgbClr val="D4CFC5"/>
+                      </a:solidFill>
+                      <a:prstDash val="solid"/>
+                      <a:round/>
+                      <a:headEnd type="none" w="med" len="med"/>
+                      <a:tailEnd type="none" w="med" len="med"/>
+                    </a:lnB>
+                    <a:solidFill>
+                      <a:srgbClr val="FFFFFF"/>
+                    </a:solidFill>
+                  </a:tcPr>
+                </a:tc>
+                <a:tc>
+                  <a:txBody>
+                    <a:bodyPr/>
+                    <a:lstStyle/>
+                    <a:p>
+                      <a:pPr algn="r" indent="0" marL="0">
+                        <a:buNone/>
+                      </a:pPr>
+                      <a:r>
+                        <a:rPr lang="en-US" sz="1250" b="1" dirty="0">
+                          <a:solidFill>
+                            <a:srgbClr val="2F8250"/>
+                          </a:solidFill>
+                          <a:latin typeface="Calibri" pitchFamily="34" charset="0"/>
+                          <a:ea typeface="Calibri" pitchFamily="34" charset="-122"/>
+                          <a:cs typeface="Calibri" pitchFamily="34" charset="-120"/>
+                        </a:rPr>
+                        <a:t>exact</a:t>
+                      </a:r>
+                      <a:endParaRPr lang="en-US" sz="1250" dirty="0">
+                        <a:latin typeface="Calibri" charset="0"/>
+                        <a:ea typeface="Calibri" charset="0"/>
+                        <a:cs typeface="Calibri" charset="0"/>
+                      </a:endParaRPr>
+                    </a:p>
+                  </a:txBody>
+                  <a:tcPr marL="73152" marR="73152" marT="73152" marB="73152" anchor="ctr">
+                    <a:lnL w="9525" cap="flat" cmpd="sng" algn="ctr">
+                      <a:solidFill>
+                        <a:srgbClr val="D4CFC5"/>
+                      </a:solidFill>
+                      <a:prstDash val="solid"/>
+                      <a:round/>
+                      <a:headEnd type="none" w="med" len="med"/>
+                      <a:tailEnd type="none" w="med" len="med"/>
+                    </a:lnL>
+                    <a:lnR w="9525" cap="flat" cmpd="sng" algn="ctr">
+                      <a:solidFill>
+                        <a:srgbClr val="D4CFC5"/>
+                      </a:solidFill>
+                      <a:prstDash val="solid"/>
+                      <a:round/>
+                      <a:headEnd type="none" w="med" len="med"/>
+                      <a:tailEnd type="none" w="med" len="med"/>
+                    </a:lnR>
+                    <a:lnT w="9525" cap="flat" cmpd="sng" algn="ctr">
+                      <a:solidFill>
+                        <a:srgbClr val="D4CFC5"/>
+                      </a:solidFill>
+                      <a:prstDash val="solid"/>
+                      <a:round/>
+                      <a:headEnd type="none" w="med" len="med"/>
+                      <a:tailEnd type="none" w="med" len="med"/>
+                    </a:lnT>
+                    <a:lnB w="9525" cap="flat" cmpd="sng" algn="ctr">
+                      <a:solidFill>
+                        <a:srgbClr val="D4CFC5"/>
+                      </a:solidFill>
+                      <a:prstDash val="solid"/>
+                      <a:round/>
+                      <a:headEnd type="none" w="med" len="med"/>
+                      <a:tailEnd type="none" w="med" len="med"/>
+                    </a:lnB>
+                    <a:solidFill>
+                      <a:srgbClr val="FFFFFF"/>
+                    </a:solidFill>
+                  </a:tcPr>
+                </a:tc>
+              </a:tr>
+              <a:tr h="420624">
+                <a:tc>
+                  <a:txBody>
+                    <a:bodyPr/>
+                    <a:lstStyle/>
+                    <a:p>
+                      <a:pPr algn="l" indent="0" marL="0">
+                        <a:buNone/>
+                      </a:pPr>
+                      <a:r>
+                        <a:rPr lang="en-US" sz="1250" dirty="0">
+                          <a:solidFill>
+                            <a:srgbClr val="1B1C1E"/>
+                          </a:solidFill>
+                          <a:latin typeface="Calibri" pitchFamily="34" charset="0"/>
+                          <a:ea typeface="Calibri" pitchFamily="34" charset="-122"/>
+                          <a:cs typeface="Calibri" pitchFamily="34" charset="-120"/>
+                        </a:rPr>
+                        <a:t>700  Pool Plumbing</a:t>
+                      </a:r>
+                      <a:endParaRPr lang="en-US" sz="1250" dirty="0">
+                        <a:latin typeface="Calibri" charset="0"/>
+                        <a:ea typeface="Calibri" charset="0"/>
+                        <a:cs typeface="Calibri" charset="0"/>
+                      </a:endParaRPr>
+                    </a:p>
+                  </a:txBody>
+                  <a:tcPr marL="73152" marR="73152" marT="73152" marB="73152" anchor="ctr">
+                    <a:lnL w="9525" cap="flat" cmpd="sng" algn="ctr">
+                      <a:solidFill>
+                        <a:srgbClr val="D4CFC5"/>
+                      </a:solidFill>
+                      <a:prstDash val="solid"/>
+                      <a:round/>
+                      <a:headEnd type="none" w="med" len="med"/>
+                      <a:tailEnd type="none" w="med" len="med"/>
+                    </a:lnL>
+                    <a:lnR w="9525" cap="flat" cmpd="sng" algn="ctr">
+                      <a:solidFill>
+                        <a:srgbClr val="D4CFC5"/>
+                      </a:solidFill>
+                      <a:prstDash val="solid"/>
+                      <a:round/>
+                      <a:headEnd type="none" w="med" len="med"/>
+                      <a:tailEnd type="none" w="med" len="med"/>
+                    </a:lnR>
+                    <a:lnT w="9525" cap="flat" cmpd="sng" algn="ctr">
+                      <a:solidFill>
+                        <a:srgbClr val="D4CFC5"/>
+                      </a:solidFill>
+                      <a:prstDash val="solid"/>
+                      <a:round/>
+                      <a:headEnd type="none" w="med" len="med"/>
+                      <a:tailEnd type="none" w="med" len="med"/>
+                    </a:lnT>
+                    <a:lnB w="9525" cap="flat" cmpd="sng" algn="ctr">
+                      <a:solidFill>
+                        <a:srgbClr val="D4CFC5"/>
+                      </a:solidFill>
+                      <a:prstDash val="solid"/>
+                      <a:round/>
+                      <a:headEnd type="none" w="med" len="med"/>
+                      <a:tailEnd type="none" w="med" len="med"/>
+                    </a:lnB>
+                    <a:solidFill>
+                      <a:srgbClr val="FFFFFF"/>
+                    </a:solidFill>
+                  </a:tcPr>
+                </a:tc>
+                <a:tc>
+                  <a:txBody>
+                    <a:bodyPr/>
+                    <a:lstStyle/>
+                    <a:p>
+                      <a:pPr algn="r" indent="0" marL="0">
+                        <a:buNone/>
+                      </a:pPr>
+                      <a:r>
+                        <a:rPr lang="en-US" sz="1250" dirty="0">
+                          <a:solidFill>
+                            <a:srgbClr val="1B1C1E"/>
+                          </a:solidFill>
+                          <a:latin typeface="Calibri" pitchFamily="34" charset="0"/>
+                          <a:ea typeface="Calibri" pitchFamily="34" charset="-122"/>
+                          <a:cs typeface="Calibri" pitchFamily="34" charset="-120"/>
+                        </a:rPr>
+                        <a:t>$8,101</a:t>
+                      </a:r>
+                      <a:endParaRPr lang="en-US" sz="1250" dirty="0">
+                        <a:latin typeface="Calibri" charset="0"/>
+                        <a:ea typeface="Calibri" charset="0"/>
+                        <a:cs typeface="Calibri" charset="0"/>
+                      </a:endParaRPr>
+                    </a:p>
+                  </a:txBody>
+                  <a:tcPr marL="73152" marR="73152" marT="73152" marB="73152" anchor="ctr">
+                    <a:lnL w="9525" cap="flat" cmpd="sng" algn="ctr">
+                      <a:solidFill>
+                        <a:srgbClr val="D4CFC5"/>
+                      </a:solidFill>
+                      <a:prstDash val="solid"/>
+                      <a:round/>
+                      <a:headEnd type="none" w="med" len="med"/>
+                      <a:tailEnd type="none" w="med" len="med"/>
+                    </a:lnL>
+                    <a:lnR w="9525" cap="flat" cmpd="sng" algn="ctr">
+                      <a:solidFill>
+                        <a:srgbClr val="D4CFC5"/>
+                      </a:solidFill>
+                      <a:prstDash val="solid"/>
+                      <a:round/>
+                      <a:headEnd type="none" w="med" len="med"/>
+                      <a:tailEnd type="none" w="med" len="med"/>
+                    </a:lnR>
+                    <a:lnT w="9525" cap="flat" cmpd="sng" algn="ctr">
+                      <a:solidFill>
+                        <a:srgbClr val="D4CFC5"/>
+                      </a:solidFill>
+                      <a:prstDash val="solid"/>
+                      <a:round/>
+                      <a:headEnd type="none" w="med" len="med"/>
+                      <a:tailEnd type="none" w="med" len="med"/>
+                    </a:lnT>
+                    <a:lnB w="9525" cap="flat" cmpd="sng" algn="ctr">
+                      <a:solidFill>
+                        <a:srgbClr val="D4CFC5"/>
+                      </a:solidFill>
+                      <a:prstDash val="solid"/>
+                      <a:round/>
+                      <a:headEnd type="none" w="med" len="med"/>
+                      <a:tailEnd type="none" w="med" len="med"/>
+                    </a:lnB>
+                    <a:solidFill>
+                      <a:srgbClr val="FFFFFF"/>
+                    </a:solidFill>
+                  </a:tcPr>
+                </a:tc>
+                <a:tc>
+                  <a:txBody>
+                    <a:bodyPr/>
+                    <a:lstStyle/>
+                    <a:p>
+                      <a:pPr algn="r" indent="0" marL="0">
+                        <a:buNone/>
+                      </a:pPr>
+                      <a:r>
+                        <a:rPr lang="en-US" sz="1250" dirty="0">
+                          <a:solidFill>
+                            <a:srgbClr val="1B1C1E"/>
+                          </a:solidFill>
+                          <a:latin typeface="Calibri" pitchFamily="34" charset="0"/>
+                          <a:ea typeface="Calibri" pitchFamily="34" charset="-122"/>
+                          <a:cs typeface="Calibri" pitchFamily="34" charset="-120"/>
+                        </a:rPr>
+                        <a:t>$8,100</a:t>
                       </a:r>
                       <a:endParaRPr lang="en-US" sz="1250" dirty="0">
                         <a:latin typeface="Calibri" charset="0"/>
@@ -17174,7 +17448,7 @@
                           <a:ea typeface="Calibri" pitchFamily="34" charset="-122"/>
                           <a:cs typeface="Calibri" pitchFamily="34" charset="-120"/>
                         </a:rPr>
-                        <a:t>$61,552</a:t>
+                        <a:t>$69,653</a:t>
                       </a:r>
                       <a:endParaRPr lang="en-US" sz="1250" dirty="0">
                         <a:latin typeface="Calibri" charset="0"/>
@@ -17242,7 +17516,7 @@
                           <a:ea typeface="Calibri" pitchFamily="34" charset="-122"/>
                           <a:cs typeface="Calibri" pitchFamily="34" charset="-120"/>
                         </a:rPr>
-                        <a:t>$61,550</a:t>
+                        <a:t>$69,650</a:t>
                       </a:r>
                       <a:endParaRPr lang="en-US" sz="1250" dirty="0">
                         <a:latin typeface="Calibri" charset="0"/>
@@ -17304,13 +17578,13 @@
                       <a:r>
                         <a:rPr lang="en-US" sz="1250" b="1" dirty="0">
                           <a:solidFill>
-                            <a:srgbClr val="2F8250"/>
+                            <a:srgbClr val="E0901B"/>
                           </a:solidFill>
                           <a:latin typeface="Calibri" pitchFamily="34" charset="0"/>
                           <a:ea typeface="Calibri" pitchFamily="34" charset="-122"/>
                           <a:cs typeface="Calibri" pitchFamily="34" charset="-120"/>
                         </a:rPr>
-                        <a:t>0.0%</a:t>
+                        <a:t>calibrated</a:t>
                       </a:r>
                       <a:endParaRPr lang="en-US" sz="1250" dirty="0">
                         <a:latin typeface="Calibri" charset="0"/>
@@ -17514,7 +17788,7 @@
                 <a:ea typeface="Calibri" pitchFamily="34" charset="-122"/>
                 <a:cs typeface="Calibri" pitchFamily="34" charset="-120"/>
               </a:rPr>
-              <a:t>Built from dimensions alone, then checked against the real estimate line by line.</a:t>
+              <a:t>Whitaker seeded the current unit rates, so this is a calibration replay — not an independent validation.</a:t>
             </a:r>
             <a:endParaRPr lang="en-US" sz="1200" dirty="0"/>
           </a:p>
@@ -17543,7 +17817,7 @@
                 <a:ea typeface="Calibri" pitchFamily="34" charset="-122"/>
                 <a:cs typeface="Calibri" pitchFamily="34" charset="-120"/>
               </a:rPr>
-              <a:t>Not fitted to the answer — derived, then compared. Six of your finishes lines, the excavation, the shell and the deck all land on the dollar.</a:t>
+              <a:t>It proves the formulas, quantities and line extensions are traceable. Predictive accuracy still requires a second completed job the model has never seen.</a:t>
             </a:r>
             <a:endParaRPr lang="en-US" sz="1200" dirty="0"/>
           </a:p>
@@ -17692,7 +17966,7 @@
                 <a:ea typeface="Cambria" pitchFamily="34" charset="-122"/>
                 <a:cs typeface="Cambria" pitchFamily="34" charset="-120"/>
               </a:rPr>
-              <a:t>Your pricing instincts are already right</a:t>
+              <a:t>The seeded rates pass a reasonableness check</a:t>
             </a:r>
             <a:endParaRPr lang="en-US" sz="3400" dirty="0"/>
           </a:p>
@@ -18226,7 +18500,7 @@
                 <a:ea typeface="Calibri" pitchFamily="34" charset="-122"/>
                 <a:cs typeface="Calibri" pitchFamily="34" charset="-120"/>
               </a:rPr>
-              <a:t>Every rate we back-solved from your estimate lands inside published industry ranges. The numbers in your head are well calibrated — they simply cannot transfer to anyone else, scale past what you personally price, or be shown to a customer who asks.</a:t>
+              <a:t>Every rate back-solved from the Whitaker estimate lands inside the cited published ranges. That is a useful reasonableness check, not proof of predictive accuracy. The next step is to test the frozen model against a completed job it did not calibrate.</a:t>
             </a:r>
             <a:endParaRPr lang="en-US" sz="1400" dirty="0"/>
           </a:p>
